--- a/samples/presentations/项目周报-2026-06-20.pptx
+++ b/samples/presentations/项目周报-2026-06-20.pptx
@@ -11,6 +11,12 @@
     <p:sldId id="259" r:id="rId10"/>
     <p:sldId id="260" r:id="rId11"/>
     <p:sldId id="261" r:id="rId12"/>
+    <p:sldId id="262" r:id="rId13"/>
+    <p:sldId id="263" r:id="rId14"/>
+    <p:sldId id="264" r:id="rId15"/>
+    <p:sldId id="265" r:id="rId16"/>
+    <p:sldId id="266" r:id="rId17"/>
+    <p:sldId id="267" r:id="rId18"/>
   </p:sldIdLst>
   <p:sldSz cx="12191695" cy="6858000" type="screen4x3"/>
   <p:notesSz cx="6858000" cy="9144000"/>
@@ -3145,10 +3151,515 @@
           <a:p>
             <a:pPr algn="ctr"/>
             <a:r>
-              <a:t>张三 · Tech Lead</a:t>
+              <a:t>陈强 · 技术负责人 · Nexora Tech</a:t>
               <a:rPr sz="1600">
                 <a:solidFill>
                   <a:srgbClr val="888888"/>
+                </a:solidFill>
+                <a:latin typeface="Helvetica Neue"/>
+                <a:ea typeface="PingFang SC"/>
+                <a:cs typeface="PingFang SC"/>
+              </a:rPr>
+            </a:r>
+          </a:p>
+        </p:txBody>
+      </p:sp>
+    </p:spTree>
+  </p:cSld>
+  <p:clrMapOvr>
+    <a:masterClrMapping/>
+  </p:clrMapOvr>
+</p:sld>
+</file>
+
+<file path=ppt/slides/slide10.xml><?xml version="1.0" encoding="utf-8"?>
+<p:sld xmlns:a="http://schemas.openxmlformats.org/drawingml/2006/main" xmlns:p="http://schemas.openxmlformats.org/presentationml/2006/main" xmlns:r="http://schemas.openxmlformats.org/officeDocument/2006/relationships">
+  <p:cSld>
+    <p:spTree>
+      <p:nvGrpSpPr>
+        <p:cNvPr id="1" name=""/>
+        <p:cNvGrpSpPr/>
+        <p:nvPr/>
+      </p:nvGrpSpPr>
+      <p:grpSpPr/>
+      <p:sp>
+        <p:nvSpPr>
+          <p:cNvPr id="2" name="TextBox 1"/>
+          <p:cNvSpPr txBox="1"/>
+          <p:nvPr/>
+        </p:nvSpPr>
+        <p:spPr>
+          <a:xfrm>
+            <a:off x="914400" y="457200"/>
+            <a:ext cx="10058400" cy="914400"/>
+          </a:xfrm>
+          <a:prstGeom prst="rect">
+            <a:avLst/>
+          </a:prstGeom>
+          <a:noFill/>
+        </p:spPr>
+        <p:txBody>
+          <a:bodyPr wrap="none">
+            <a:spAutoFit/>
+          </a:bodyPr>
+          <a:lstStyle/>
+          <a:p>
+            <a:r>
+              <a:t>遇到的问题与解决方案</a:t>
+              <a:rPr sz="3200" b="1">
+                <a:solidFill>
+                  <a:srgbClr val="000000"/>
+                </a:solidFill>
+                <a:latin typeface="Helvetica Neue"/>
+                <a:ea typeface="PingFang SC"/>
+                <a:cs typeface="PingFang SC"/>
+              </a:rPr>
+            </a:r>
+          </a:p>
+        </p:txBody>
+      </p:sp>
+      <p:sp>
+        <p:nvSpPr>
+          <p:cNvPr id="3" name="TextBox 2"/>
+          <p:cNvSpPr txBox="1"/>
+          <p:nvPr/>
+        </p:nvSpPr>
+        <p:spPr>
+          <a:xfrm>
+            <a:off x="914400" y="1828800"/>
+            <a:ext cx="10058400" cy="4572000"/>
+          </a:xfrm>
+          <a:prstGeom prst="rect">
+            <a:avLst/>
+          </a:prstGeom>
+          <a:noFill/>
+        </p:spPr>
+        <p:txBody>
+          <a:bodyPr wrap="square">
+            <a:spAutoFit/>
+          </a:bodyPr>
+          <a:lstStyle/>
+          <a:p/>
+          <a:p>
+            <a:pPr algn="l"/>
+            <a:r>
+              <a:t>问题 1: Azure AD redirect_uri 配置</a:t>
+              <a:rPr sz="1800" b="1">
+                <a:solidFill>
+                  <a:srgbClr val="CC0000"/>
+                </a:solidFill>
+                <a:latin typeface="Helvetica Neue"/>
+                <a:ea typeface="PingFang SC"/>
+                <a:cs typeface="PingFang SC"/>
+              </a:rPr>
+            </a:r>
+          </a:p>
+          <a:p>
+            <a:pPr algn="l"/>
+            <a:r>
+              <a:t>→ 一个 App Registration 配多个 uri，用环境变量区分</a:t>
+              <a:rPr sz="1800">
+                <a:solidFill>
+                  <a:srgbClr val="008800"/>
+                </a:solidFill>
+                <a:latin typeface="Helvetica Neue"/>
+                <a:ea typeface="PingFang SC"/>
+                <a:cs typeface="PingFang SC"/>
+              </a:rPr>
+            </a:r>
+          </a:p>
+          <a:p>
+            <a:pPr algn="l"/>
+            <a:r>
+              <a:t/>
+              <a:rPr sz="1800">
+                <a:solidFill>
+                  <a:srgbClr val="000000"/>
+                </a:solidFill>
+                <a:latin typeface="Helvetica Neue"/>
+                <a:ea typeface="PingFang SC"/>
+                <a:cs typeface="PingFang SC"/>
+              </a:rPr>
+            </a:r>
+          </a:p>
+          <a:p>
+            <a:pPr algn="l"/>
+            <a:r>
+              <a:t>问题 2: Token 刷新竞态条件（BUG-215）</a:t>
+              <a:rPr sz="1800" b="1">
+                <a:solidFill>
+                  <a:srgbClr val="CC0000"/>
+                </a:solidFill>
+                <a:latin typeface="Helvetica Neue"/>
+                <a:ea typeface="PingFang SC"/>
+                <a:cs typeface="PingFang SC"/>
+              </a:rPr>
+            </a:r>
+          </a:p>
+          <a:p>
+            <a:pPr algn="l"/>
+            <a:r>
+              <a:t>→ 队列机制：刷新中请求排队等待，刷新后用新 Token 重发</a:t>
+              <a:rPr sz="1800">
+                <a:solidFill>
+                  <a:srgbClr val="008800"/>
+                </a:solidFill>
+                <a:latin typeface="Helvetica Neue"/>
+                <a:ea typeface="PingFang SC"/>
+                <a:cs typeface="PingFang SC"/>
+              </a:rPr>
+            </a:r>
+          </a:p>
+          <a:p>
+            <a:pPr algn="l"/>
+            <a:r>
+              <a:t/>
+              <a:rPr sz="1800">
+                <a:solidFill>
+                  <a:srgbClr val="000000"/>
+                </a:solidFill>
+                <a:latin typeface="Helvetica Neue"/>
+                <a:ea typeface="PingFang SC"/>
+                <a:cs typeface="PingFang SC"/>
+              </a:rPr>
+            </a:r>
+          </a:p>
+          <a:p>
+            <a:pPr algn="l"/>
+            <a:r>
+              <a:t>问题 3: GitHub OAuth 回调超时（BUG-216）</a:t>
+              <a:rPr sz="1800" b="1">
+                <a:solidFill>
+                  <a:srgbClr val="CC0000"/>
+                </a:solidFill>
+                <a:latin typeface="Helvetica Neue"/>
+                <a:ea typeface="PingFang SC"/>
+                <a:cs typeface="PingFang SC"/>
+              </a:rPr>
+            </a:r>
+          </a:p>
+          <a:p>
+            <a:pPr algn="l"/>
+            <a:r>
+              <a:t>→ 增加超时到 10s + 重试机制</a:t>
+              <a:rPr sz="1800">
+                <a:solidFill>
+                  <a:srgbClr val="008800"/>
+                </a:solidFill>
+                <a:latin typeface="Helvetica Neue"/>
+                <a:ea typeface="PingFang SC"/>
+                <a:cs typeface="PingFang SC"/>
+              </a:rPr>
+            </a:r>
+          </a:p>
+          <a:p>
+            <a:pPr algn="l"/>
+            <a:r>
+              <a:t/>
+              <a:rPr sz="1800">
+                <a:solidFill>
+                  <a:srgbClr val="000000"/>
+                </a:solidFill>
+                <a:latin typeface="Helvetica Neue"/>
+                <a:ea typeface="PingFang SC"/>
+                <a:cs typeface="PingFang SC"/>
+              </a:rPr>
+            </a:r>
+          </a:p>
+          <a:p>
+            <a:pPr algn="l"/>
+            <a:r>
+              <a:t>问题 4: Gemini systemPromptMode 不兼容</a:t>
+              <a:rPr sz="1800" b="1">
+                <a:solidFill>
+                  <a:srgbClr val="CC0000"/>
+                </a:solidFill>
+                <a:latin typeface="Helvetica Neue"/>
+                <a:ea typeface="PingFang SC"/>
+                <a:cs typeface="PingFang SC"/>
+              </a:rPr>
+            </a:r>
+          </a:p>
+          <a:p>
+            <a:pPr algn="l"/>
+            <a:r>
+              <a:t>→ ModelCapabilities 查询机制，自动适配参数差异</a:t>
+              <a:rPr sz="1800">
+                <a:solidFill>
+                  <a:srgbClr val="008800"/>
+                </a:solidFill>
+                <a:latin typeface="Helvetica Neue"/>
+                <a:ea typeface="PingFang SC"/>
+                <a:cs typeface="PingFang SC"/>
+              </a:rPr>
+            </a:r>
+          </a:p>
+        </p:txBody>
+      </p:sp>
+    </p:spTree>
+  </p:cSld>
+  <p:clrMapOvr>
+    <a:masterClrMapping/>
+  </p:clrMapOvr>
+</p:sld>
+</file>
+
+<file path=ppt/slides/slide11.xml><?xml version="1.0" encoding="utf-8"?>
+<p:sld xmlns:a="http://schemas.openxmlformats.org/drawingml/2006/main" xmlns:p="http://schemas.openxmlformats.org/presentationml/2006/main" xmlns:r="http://schemas.openxmlformats.org/officeDocument/2006/relationships">
+  <p:cSld>
+    <p:spTree>
+      <p:nvGrpSpPr>
+        <p:cNvPr id="1" name=""/>
+        <p:cNvGrpSpPr/>
+        <p:nvPr/>
+      </p:nvGrpSpPr>
+      <p:grpSpPr/>
+      <p:sp>
+        <p:nvSpPr>
+          <p:cNvPr id="2" name="TextBox 1"/>
+          <p:cNvSpPr txBox="1"/>
+          <p:nvPr/>
+        </p:nvSpPr>
+        <p:spPr>
+          <a:xfrm>
+            <a:off x="914400" y="457200"/>
+            <a:ext cx="10058400" cy="914400"/>
+          </a:xfrm>
+          <a:prstGeom prst="rect">
+            <a:avLst/>
+          </a:prstGeom>
+          <a:noFill/>
+        </p:spPr>
+        <p:txBody>
+          <a:bodyPr wrap="none">
+            <a:spAutoFit/>
+          </a:bodyPr>
+          <a:lstStyle/>
+          <a:p>
+            <a:r>
+              <a:t>团队协作</a:t>
+              <a:rPr sz="3200" b="1">
+                <a:solidFill>
+                  <a:srgbClr val="000000"/>
+                </a:solidFill>
+                <a:latin typeface="Helvetica Neue"/>
+                <a:ea typeface="PingFang SC"/>
+                <a:cs typeface="PingFang SC"/>
+              </a:rPr>
+            </a:r>
+          </a:p>
+        </p:txBody>
+      </p:sp>
+      <p:sp>
+        <p:nvSpPr>
+          <p:cNvPr id="3" name="TextBox 2"/>
+          <p:cNvSpPr txBox="1"/>
+          <p:nvPr/>
+        </p:nvSpPr>
+        <p:spPr>
+          <a:xfrm>
+            <a:off x="914400" y="1828800"/>
+            <a:ext cx="10058400" cy="3657600"/>
+          </a:xfrm>
+          <a:prstGeom prst="rect">
+            <a:avLst/>
+          </a:prstGeom>
+          <a:noFill/>
+        </p:spPr>
+        <p:txBody>
+          <a:bodyPr wrap="square">
+            <a:spAutoFit/>
+          </a:bodyPr>
+          <a:lstStyle/>
+          <a:p/>
+          <a:p>
+            <a:pPr algn="l"/>
+            <a:r>
+              <a:t>技术部（8 人）：陈强、刘伟、赵丽、孙娜、王超、周敏、徐骏、杨飞</a:t>
+              <a:rPr sz="1800">
+                <a:solidFill>
+                  <a:srgbClr val="333333"/>
+                </a:solidFill>
+                <a:latin typeface="Helvetica Neue"/>
+                <a:ea typeface="PingFang SC"/>
+                <a:cs typeface="PingFang SC"/>
+              </a:rPr>
+            </a:r>
+          </a:p>
+          <a:p>
+            <a:pPr algn="l"/>
+            <a:r>
+              <a:t>产品部（2 人）：苏楠、黄薇</a:t>
+              <a:rPr sz="1800">
+                <a:solidFill>
+                  <a:srgbClr val="333333"/>
+                </a:solidFill>
+                <a:latin typeface="Helvetica Neue"/>
+                <a:ea typeface="PingFang SC"/>
+                <a:cs typeface="PingFang SC"/>
+              </a:rPr>
+            </a:r>
+          </a:p>
+          <a:p>
+            <a:pPr algn="l"/>
+            <a:r>
+              <a:t>设计部（2 人）：罗茜、何成</a:t>
+              <a:rPr sz="1800">
+                <a:solidFill>
+                  <a:srgbClr val="333333"/>
+                </a:solidFill>
+                <a:latin typeface="Helvetica Neue"/>
+                <a:ea typeface="PingFang SC"/>
+                <a:cs typeface="PingFang SC"/>
+              </a:rPr>
+            </a:r>
+          </a:p>
+          <a:p>
+            <a:pPr algn="l"/>
+            <a:r>
+              <a:t>市场/销售（2 人）：王莉、张伟</a:t>
+              <a:rPr sz="1800">
+                <a:solidFill>
+                  <a:srgbClr val="333333"/>
+                </a:solidFill>
+                <a:latin typeface="Helvetica Neue"/>
+                <a:ea typeface="PingFang SC"/>
+                <a:cs typeface="PingFang SC"/>
+              </a:rPr>
+            </a:r>
+          </a:p>
+          <a:p>
+            <a:pPr algn="l"/>
+            <a:r>
+              <a:t>法务（1 人）：唐敏</a:t>
+              <a:rPr sz="1800">
+                <a:solidFill>
+                  <a:srgbClr val="333333"/>
+                </a:solidFill>
+                <a:latin typeface="Helvetica Neue"/>
+                <a:ea typeface="PingFang SC"/>
+                <a:cs typeface="PingFang SC"/>
+              </a:rPr>
+            </a:r>
+          </a:p>
+          <a:p>
+            <a:pPr algn="l"/>
+            <a:r>
+              <a:t>客户成功（1 人）：李鑫</a:t>
+              <a:rPr sz="1800">
+                <a:solidFill>
+                  <a:srgbClr val="333333"/>
+                </a:solidFill>
+                <a:latin typeface="Helvetica Neue"/>
+                <a:ea typeface="PingFang SC"/>
+                <a:cs typeface="PingFang SC"/>
+              </a:rPr>
+            </a:r>
+          </a:p>
+          <a:p>
+            <a:pPr algn="l"/>
+            <a:r>
+              <a:t>管理层（3 人）：陈宇、王琳、赵军</a:t>
+              <a:rPr sz="1800">
+                <a:solidFill>
+                  <a:srgbClr val="333333"/>
+                </a:solidFill>
+                <a:latin typeface="Helvetica Neue"/>
+                <a:ea typeface="PingFang SC"/>
+                <a:cs typeface="PingFang SC"/>
+              </a:rPr>
+            </a:r>
+          </a:p>
+          <a:p>
+            <a:pPr algn="l"/>
+            <a:r>
+              <a:t/>
+              <a:rPr sz="1800">
+                <a:solidFill>
+                  <a:srgbClr val="333333"/>
+                </a:solidFill>
+                <a:latin typeface="Helvetica Neue"/>
+                <a:ea typeface="PingFang SC"/>
+                <a:cs typeface="PingFang SC"/>
+              </a:rPr>
+            </a:r>
+          </a:p>
+          <a:p>
+            <a:pPr algn="l"/>
+            <a:r>
+              <a:t>月度 PR: 195 | 测试覆盖率: 68% → 87%</a:t>
+              <a:rPr sz="1800">
+                <a:solidFill>
+                  <a:srgbClr val="333333"/>
+                </a:solidFill>
+                <a:latin typeface="Helvetica Neue"/>
+                <a:ea typeface="PingFang SC"/>
+                <a:cs typeface="PingFang SC"/>
+              </a:rPr>
+            </a:r>
+          </a:p>
+        </p:txBody>
+      </p:sp>
+    </p:spTree>
+  </p:cSld>
+  <p:clrMapOvr>
+    <a:masterClrMapping/>
+  </p:clrMapOvr>
+</p:sld>
+</file>
+
+<file path=ppt/slides/slide12.xml><?xml version="1.0" encoding="utf-8"?>
+<p:sld xmlns:a="http://schemas.openxmlformats.org/drawingml/2006/main" xmlns:p="http://schemas.openxmlformats.org/presentationml/2006/main" xmlns:r="http://schemas.openxmlformats.org/officeDocument/2006/relationships">
+  <p:cSld>
+    <p:spTree>
+      <p:nvGrpSpPr>
+        <p:cNvPr id="1" name=""/>
+        <p:cNvGrpSpPr/>
+        <p:nvPr/>
+      </p:nvGrpSpPr>
+      <p:grpSpPr/>
+      <p:sp>
+        <p:nvSpPr>
+          <p:cNvPr id="2" name="TextBox 1"/>
+          <p:cNvSpPr txBox="1"/>
+          <p:nvPr/>
+        </p:nvSpPr>
+        <p:spPr>
+          <a:xfrm>
+            <a:off x="1828800" y="2286000"/>
+            <a:ext cx="8229600" cy="1828800"/>
+          </a:xfrm>
+          <a:prstGeom prst="rect">
+            <a:avLst/>
+          </a:prstGeom>
+          <a:noFill/>
+        </p:spPr>
+        <p:txBody>
+          <a:bodyPr wrap="none">
+            <a:spAutoFit/>
+          </a:bodyPr>
+          <a:lstStyle/>
+          <a:p>
+            <a:pPr algn="ctr"/>
+            <a:r>
+              <a:t>Q &amp; A</a:t>
+              <a:rPr sz="4400" b="1">
+                <a:solidFill>
+                  <a:srgbClr val="000000"/>
+                </a:solidFill>
+                <a:latin typeface="Helvetica Neue"/>
+                <a:ea typeface="PingFang SC"/>
+                <a:cs typeface="PingFang SC"/>
+              </a:rPr>
+            </a:r>
+          </a:p>
+          <a:p>
+            <a:pPr algn="ctr"/>
+            <a:r>
+              <a:t>感谢关注 i-Write 项目进展</a:t>
+              <a:rPr sz="2000">
+                <a:solidFill>
+                  <a:srgbClr val="555555"/>
                 </a:solidFill>
                 <a:latin typeface="Helvetica Neue"/>
                 <a:ea typeface="PingFang SC"/>
@@ -3440,7 +3951,7 @@
                     <a:lstStyle/>
                     <a:p>
                       <a:r>
-                        <a:t>张三</a:t>
+                        <a:t>陈强</a:t>
                         <a:rPr sz="1400">
                           <a:solidFill>
                             <a:srgbClr val="333333"/>
@@ -3502,7 +4013,7 @@
                     <a:lstStyle/>
                     <a:p>
                       <a:r>
-                        <a:t>张三、李四</a:t>
+                        <a:t>陈强、刘伟</a:t>
                         <a:rPr sz="1400">
                           <a:solidFill>
                             <a:srgbClr val="333333"/>
@@ -3564,7 +4075,7 @@
                     <a:lstStyle/>
                     <a:p>
                       <a:r>
-                        <a:t>李四</a:t>
+                        <a:t>刘伟</a:t>
                         <a:rPr sz="1400">
                           <a:solidFill>
                             <a:srgbClr val="333333"/>
@@ -3626,7 +4137,7 @@
                     <a:lstStyle/>
                     <a:p>
                       <a:r>
-                        <a:t>王五</a:t>
+                        <a:t>赵丽</a:t>
                         <a:rPr sz="1400">
                           <a:solidFill>
                             <a:srgbClr val="333333"/>
@@ -3688,7 +4199,7 @@
                     <a:lstStyle/>
                     <a:p>
                       <a:r>
-                        <a:t>王五、李四</a:t>
+                        <a:t>赵丽、刘伟</a:t>
                         <a:rPr sz="1400">
                           <a:solidFill>
                             <a:srgbClr val="333333"/>
@@ -3750,7 +4261,7 @@
                     <a:lstStyle/>
                     <a:p>
                       <a:r>
-                        <a:t>赵六</a:t>
+                        <a:t>杨飞</a:t>
                         <a:rPr sz="1400">
                           <a:solidFill>
                             <a:srgbClr val="333333"/>
@@ -3812,7 +4323,7 @@
                     <a:lstStyle/>
                     <a:p>
                       <a:r>
-                        <a:t>张三、李四</a:t>
+                        <a:t>陈强、刘伟</a:t>
                         <a:rPr sz="1400">
                           <a:solidFill>
                             <a:srgbClr val="333333"/>
@@ -3874,7 +4385,7 @@
                     <a:lstStyle/>
                     <a:p>
                       <a:r>
-                        <a:t>李四</a:t>
+                        <a:t>刘伟</a:t>
                         <a:rPr sz="1400">
                           <a:solidFill>
                             <a:srgbClr val="333333"/>
@@ -4556,6 +5067,576 @@
             <a:r>
               <a:t>4. 更新技术文档</a:t>
               <a:rPr sz="2200">
+                <a:solidFill>
+                  <a:srgbClr val="333333"/>
+                </a:solidFill>
+                <a:latin typeface="Helvetica Neue"/>
+                <a:ea typeface="PingFang SC"/>
+                <a:cs typeface="PingFang SC"/>
+              </a:rPr>
+            </a:r>
+          </a:p>
+        </p:txBody>
+      </p:sp>
+    </p:spTree>
+  </p:cSld>
+  <p:clrMapOvr>
+    <a:masterClrMapping/>
+  </p:clrMapOvr>
+</p:sld>
+</file>
+
+<file path=ppt/slides/slide7.xml><?xml version="1.0" encoding="utf-8"?>
+<p:sld xmlns:a="http://schemas.openxmlformats.org/drawingml/2006/main" xmlns:p="http://schemas.openxmlformats.org/presentationml/2006/main" xmlns:r="http://schemas.openxmlformats.org/officeDocument/2006/relationships">
+  <p:cSld>
+    <p:spTree>
+      <p:nvGrpSpPr>
+        <p:cNvPr id="1" name=""/>
+        <p:cNvGrpSpPr/>
+        <p:nvPr/>
+      </p:nvGrpSpPr>
+      <p:grpSpPr/>
+      <p:sp>
+        <p:nvSpPr>
+          <p:cNvPr id="2" name="TextBox 1"/>
+          <p:cNvSpPr txBox="1"/>
+          <p:nvPr/>
+        </p:nvSpPr>
+        <p:spPr>
+          <a:xfrm>
+            <a:off x="914400" y="457200"/>
+            <a:ext cx="10058400" cy="914400"/>
+          </a:xfrm>
+          <a:prstGeom prst="rect">
+            <a:avLst/>
+          </a:prstGeom>
+          <a:noFill/>
+        </p:spPr>
+        <p:txBody>
+          <a:bodyPr wrap="none">
+            <a:spAutoFit/>
+          </a:bodyPr>
+          <a:lstStyle/>
+          <a:p>
+            <a:r>
+              <a:t>RAG 引擎进展</a:t>
+              <a:rPr sz="3200" b="1">
+                <a:solidFill>
+                  <a:srgbClr val="000000"/>
+                </a:solidFill>
+                <a:latin typeface="Helvetica Neue"/>
+                <a:ea typeface="PingFang SC"/>
+                <a:cs typeface="PingFang SC"/>
+              </a:rPr>
+            </a:r>
+          </a:p>
+        </p:txBody>
+      </p:sp>
+      <p:sp>
+        <p:nvSpPr>
+          <p:cNvPr id="3" name="TextBox 2"/>
+          <p:cNvSpPr txBox="1"/>
+          <p:nvPr/>
+        </p:nvSpPr>
+        <p:spPr>
+          <a:xfrm>
+            <a:off x="914400" y="1828800"/>
+            <a:ext cx="10058400" cy="3657600"/>
+          </a:xfrm>
+          <a:prstGeom prst="rect">
+            <a:avLst/>
+          </a:prstGeom>
+          <a:noFill/>
+        </p:spPr>
+        <p:txBody>
+          <a:bodyPr wrap="square">
+            <a:spAutoFit/>
+          </a:bodyPr>
+          <a:lstStyle/>
+          <a:p/>
+          <a:p>
+            <a:pPr algn="l"/>
+            <a:r>
+              <a:t>Query Expansion → Hybrid Search → Reranker → Groundedness Check</a:t>
+              <a:rPr sz="1800">
+                <a:solidFill>
+                  <a:srgbClr val="333333"/>
+                </a:solidFill>
+                <a:latin typeface="Helvetica Neue"/>
+                <a:ea typeface="PingFang SC"/>
+                <a:cs typeface="PingFang SC"/>
+              </a:rPr>
+            </a:r>
+          </a:p>
+          <a:p>
+            <a:pPr algn="l"/>
+            <a:r>
+              <a:t/>
+              <a:rPr sz="1800">
+                <a:solidFill>
+                  <a:srgbClr val="333333"/>
+                </a:solidFill>
+                <a:latin typeface="Helvetica Neue"/>
+                <a:ea typeface="PingFang SC"/>
+                <a:cs typeface="PingFang SC"/>
+              </a:rPr>
+            </a:r>
+          </a:p>
+          <a:p>
+            <a:pPr algn="l"/>
+            <a:r>
+              <a:t>✅ BM25 检索（MiniSearch + jieba-wasm）— Recall@10: 0.78</a:t>
+              <a:rPr sz="1800">
+                <a:solidFill>
+                  <a:srgbClr val="333333"/>
+                </a:solidFill>
+                <a:latin typeface="Helvetica Neue"/>
+                <a:ea typeface="PingFang SC"/>
+                <a:cs typeface="PingFang SC"/>
+              </a:rPr>
+            </a:r>
+          </a:p>
+          <a:p>
+            <a:pPr algn="l"/>
+            <a:r>
+              <a:t>✅ 向量检索（SiliconFlow bge-m3, 1024 维）— Recall@10: 0.82</a:t>
+              <a:rPr sz="1800">
+                <a:solidFill>
+                  <a:srgbClr val="333333"/>
+                </a:solidFill>
+                <a:latin typeface="Helvetica Neue"/>
+                <a:ea typeface="PingFang SC"/>
+                <a:cs typeface="PingFang SC"/>
+              </a:rPr>
+            </a:r>
+          </a:p>
+          <a:p>
+            <a:pPr algn="l"/>
+            <a:r>
+              <a:t>✅ RRF 融合（k=60）— Recall@10: 0.91</a:t>
+              <a:rPr sz="1800">
+                <a:solidFill>
+                  <a:srgbClr val="333333"/>
+                </a:solidFill>
+                <a:latin typeface="Helvetica Neue"/>
+                <a:ea typeface="PingFang SC"/>
+                <a:cs typeface="PingFang SC"/>
+              </a:rPr>
+            </a:r>
+          </a:p>
+          <a:p>
+            <a:pPr algn="l"/>
+            <a:r>
+              <a:t>✅ Reranker 三级降级（远程 API → 本地 Cross-Encoder → 启发式）</a:t>
+              <a:rPr sz="1800">
+                <a:solidFill>
+                  <a:srgbClr val="333333"/>
+                </a:solidFill>
+                <a:latin typeface="Helvetica Neue"/>
+                <a:ea typeface="PingFang SC"/>
+                <a:cs typeface="PingFang SC"/>
+              </a:rPr>
+            </a:r>
+          </a:p>
+          <a:p>
+            <a:pPr algn="l"/>
+            <a:r>
+              <a:t>✅ Groundedness Check — 准确率 92%</a:t>
+              <a:rPr sz="1800">
+                <a:solidFill>
+                  <a:srgbClr val="333333"/>
+                </a:solidFill>
+                <a:latin typeface="Helvetica Neue"/>
+                <a:ea typeface="PingFang SC"/>
+                <a:cs typeface="PingFang SC"/>
+              </a:rPr>
+            </a:r>
+          </a:p>
+          <a:p>
+            <a:pPr algn="l"/>
+            <a:r>
+              <a:t/>
+              <a:rPr sz="1800">
+                <a:solidFill>
+                  <a:srgbClr val="333333"/>
+                </a:solidFill>
+                <a:latin typeface="Helvetica Neue"/>
+                <a:ea typeface="PingFang SC"/>
+                <a:cs typeface="PingFang SC"/>
+              </a:rPr>
+            </a:r>
+          </a:p>
+          <a:p>
+            <a:pPr algn="l"/>
+            <a:r>
+              <a:t>端到端延迟: &lt; 3s（P95）</a:t>
+              <a:rPr sz="1800">
+                <a:solidFill>
+                  <a:srgbClr val="333333"/>
+                </a:solidFill>
+                <a:latin typeface="Helvetica Neue"/>
+                <a:ea typeface="PingFang SC"/>
+                <a:cs typeface="PingFang SC"/>
+              </a:rPr>
+            </a:r>
+          </a:p>
+        </p:txBody>
+      </p:sp>
+    </p:spTree>
+  </p:cSld>
+  <p:clrMapOvr>
+    <a:masterClrMapping/>
+  </p:clrMapOvr>
+</p:sld>
+</file>
+
+<file path=ppt/slides/slide8.xml><?xml version="1.0" encoding="utf-8"?>
+<p:sld xmlns:a="http://schemas.openxmlformats.org/drawingml/2006/main" xmlns:p="http://schemas.openxmlformats.org/presentationml/2006/main" xmlns:r="http://schemas.openxmlformats.org/officeDocument/2006/relationships">
+  <p:cSld>
+    <p:spTree>
+      <p:nvGrpSpPr>
+        <p:cNvPr id="1" name=""/>
+        <p:cNvGrpSpPr/>
+        <p:nvPr/>
+      </p:nvGrpSpPr>
+      <p:grpSpPr/>
+      <p:sp>
+        <p:nvSpPr>
+          <p:cNvPr id="2" name="TextBox 1"/>
+          <p:cNvSpPr txBox="1"/>
+          <p:nvPr/>
+        </p:nvSpPr>
+        <p:spPr>
+          <a:xfrm>
+            <a:off x="914400" y="457200"/>
+            <a:ext cx="10058400" cy="914400"/>
+          </a:xfrm>
+          <a:prstGeom prst="rect">
+            <a:avLst/>
+          </a:prstGeom>
+          <a:noFill/>
+        </p:spPr>
+        <p:txBody>
+          <a:bodyPr wrap="none">
+            <a:spAutoFit/>
+          </a:bodyPr>
+          <a:lstStyle/>
+          <a:p>
+            <a:r>
+              <a:t>认证模块架构</a:t>
+              <a:rPr sz="3200" b="1">
+                <a:solidFill>
+                  <a:srgbClr val="000000"/>
+                </a:solidFill>
+                <a:latin typeface="Helvetica Neue"/>
+                <a:ea typeface="PingFang SC"/>
+                <a:cs typeface="PingFang SC"/>
+              </a:rPr>
+            </a:r>
+          </a:p>
+        </p:txBody>
+      </p:sp>
+      <p:sp>
+        <p:nvSpPr>
+          <p:cNvPr id="3" name="TextBox 2"/>
+          <p:cNvSpPr txBox="1"/>
+          <p:nvPr/>
+        </p:nvSpPr>
+        <p:spPr>
+          <a:xfrm>
+            <a:off x="914400" y="1828800"/>
+            <a:ext cx="10058400" cy="3657600"/>
+          </a:xfrm>
+          <a:prstGeom prst="rect">
+            <a:avLst/>
+          </a:prstGeom>
+          <a:noFill/>
+        </p:spPr>
+        <p:txBody>
+          <a:bodyPr wrap="square">
+            <a:spAutoFit/>
+          </a:bodyPr>
+          <a:lstStyle/>
+          <a:p/>
+          <a:p>
+            <a:pPr algn="l"/>
+            <a:r>
+              <a:t>User → OAuth2 Provider → Callback → JWT Generation → Frontend Storage</a:t>
+              <a:rPr sz="1800">
+                <a:solidFill>
+                  <a:srgbClr val="333333"/>
+                </a:solidFill>
+                <a:latin typeface="Helvetica Neue"/>
+                <a:ea typeface="PingFang SC"/>
+                <a:cs typeface="PingFang SC"/>
+              </a:rPr>
+            </a:r>
+          </a:p>
+          <a:p>
+            <a:pPr algn="l"/>
+            <a:r>
+              <a:t/>
+              <a:rPr sz="1800">
+                <a:solidFill>
+                  <a:srgbClr val="333333"/>
+                </a:solidFill>
+                <a:latin typeface="Helvetica Neue"/>
+                <a:ea typeface="PingFang SC"/>
+                <a:cs typeface="PingFang SC"/>
+              </a:rPr>
+            </a:r>
+          </a:p>
+          <a:p>
+            <a:pPr algn="l"/>
+            <a:r>
+              <a:t>✅ Microsoft OAuth2（MSAL.js + PKCE）</a:t>
+              <a:rPr sz="1800">
+                <a:solidFill>
+                  <a:srgbClr val="333333"/>
+                </a:solidFill>
+                <a:latin typeface="Helvetica Neue"/>
+                <a:ea typeface="PingFang SC"/>
+                <a:cs typeface="PingFang SC"/>
+              </a:rPr>
+            </a:r>
+          </a:p>
+          <a:p>
+            <a:pPr algn="l"/>
+            <a:r>
+              <a:t>✅ GitHub OAuth（passport.js）</a:t>
+              <a:rPr sz="1800">
+                <a:solidFill>
+                  <a:srgbClr val="333333"/>
+                </a:solidFill>
+                <a:latin typeface="Helvetica Neue"/>
+                <a:ea typeface="PingFang SC"/>
+                <a:cs typeface="PingFang SC"/>
+              </a:rPr>
+            </a:r>
+          </a:p>
+          <a:p>
+            <a:pPr algn="l"/>
+            <a:r>
+              <a:t>✅ JWT Token 管理（Access Token 1h + Refresh Token 7d）</a:t>
+              <a:rPr sz="1800">
+                <a:solidFill>
+                  <a:srgbClr val="333333"/>
+                </a:solidFill>
+                <a:latin typeface="Helvetica Neue"/>
+                <a:ea typeface="PingFang SC"/>
+                <a:cs typeface="PingFang SC"/>
+              </a:rPr>
+            </a:r>
+          </a:p>
+          <a:p>
+            <a:pPr algn="l"/>
+            <a:r>
+              <a:t>✅ Token 刷新队列机制（修复 BUG-215 竞态条件）</a:t>
+              <a:rPr sz="1800">
+                <a:solidFill>
+                  <a:srgbClr val="333333"/>
+                </a:solidFill>
+                <a:latin typeface="Helvetica Neue"/>
+                <a:ea typeface="PingFang SC"/>
+                <a:cs typeface="PingFang SC"/>
+              </a:rPr>
+            </a:r>
+          </a:p>
+          <a:p>
+            <a:pPr algn="l"/>
+            <a:r>
+              <a:t/>
+              <a:rPr sz="1800">
+                <a:solidFill>
+                  <a:srgbClr val="333333"/>
+                </a:solidFill>
+                <a:latin typeface="Helvetica Neue"/>
+                <a:ea typeface="PingFang SC"/>
+                <a:cs typeface="PingFang SC"/>
+              </a:rPr>
+            </a:r>
+          </a:p>
+          <a:p>
+            <a:pPr algn="l"/>
+            <a:r>
+              <a:t>登录成功率: 99.8% | Token 刷新成功率: 99.95%</a:t>
+              <a:rPr sz="1800">
+                <a:solidFill>
+                  <a:srgbClr val="333333"/>
+                </a:solidFill>
+                <a:latin typeface="Helvetica Neue"/>
+                <a:ea typeface="PingFang SC"/>
+                <a:cs typeface="PingFang SC"/>
+              </a:rPr>
+            </a:r>
+          </a:p>
+        </p:txBody>
+      </p:sp>
+    </p:spTree>
+  </p:cSld>
+  <p:clrMapOvr>
+    <a:masterClrMapping/>
+  </p:clrMapOvr>
+</p:sld>
+</file>
+
+<file path=ppt/slides/slide9.xml><?xml version="1.0" encoding="utf-8"?>
+<p:sld xmlns:a="http://schemas.openxmlformats.org/drawingml/2006/main" xmlns:p="http://schemas.openxmlformats.org/presentationml/2006/main" xmlns:r="http://schemas.openxmlformats.org/officeDocument/2006/relationships">
+  <p:cSld>
+    <p:spTree>
+      <p:nvGrpSpPr>
+        <p:cNvPr id="1" name=""/>
+        <p:cNvGrpSpPr/>
+        <p:nvPr/>
+      </p:nvGrpSpPr>
+      <p:grpSpPr/>
+      <p:sp>
+        <p:nvSpPr>
+          <p:cNvPr id="2" name="TextBox 1"/>
+          <p:cNvSpPr txBox="1"/>
+          <p:nvPr/>
+        </p:nvSpPr>
+        <p:spPr>
+          <a:xfrm>
+            <a:off x="914400" y="457200"/>
+            <a:ext cx="10058400" cy="914400"/>
+          </a:xfrm>
+          <a:prstGeom prst="rect">
+            <a:avLst/>
+          </a:prstGeom>
+          <a:noFill/>
+        </p:spPr>
+        <p:txBody>
+          <a:bodyPr wrap="none">
+            <a:spAutoFit/>
+          </a:bodyPr>
+          <a:lstStyle/>
+          <a:p>
+            <a:r>
+              <a:t>Bug 趋势</a:t>
+              <a:rPr sz="3200" b="1">
+                <a:solidFill>
+                  <a:srgbClr val="000000"/>
+                </a:solidFill>
+                <a:latin typeface="Helvetica Neue"/>
+                <a:ea typeface="PingFang SC"/>
+                <a:cs typeface="PingFang SC"/>
+              </a:rPr>
+            </a:r>
+          </a:p>
+        </p:txBody>
+      </p:sp>
+      <p:sp>
+        <p:nvSpPr>
+          <p:cNvPr id="3" name="TextBox 2"/>
+          <p:cNvSpPr txBox="1"/>
+          <p:nvPr/>
+        </p:nvSpPr>
+        <p:spPr>
+          <a:xfrm>
+            <a:off x="914400" y="1828800"/>
+            <a:ext cx="10058400" cy="3657600"/>
+          </a:xfrm>
+          <a:prstGeom prst="rect">
+            <a:avLst/>
+          </a:prstGeom>
+          <a:noFill/>
+        </p:spPr>
+        <p:txBody>
+          <a:bodyPr wrap="square">
+            <a:spAutoFit/>
+          </a:bodyPr>
+          <a:lstStyle/>
+          <a:p/>
+          <a:p>
+            <a:pPr algn="l"/>
+            <a:r>
+              <a:t>Sprint 1: 新增 3 / 修复 0 — 基础设施搭建阶段</a:t>
+              <a:rPr sz="1800">
+                <a:solidFill>
+                  <a:srgbClr val="333333"/>
+                </a:solidFill>
+                <a:latin typeface="Helvetica Neue"/>
+                <a:ea typeface="PingFang SC"/>
+                <a:cs typeface="PingFang SC"/>
+              </a:rPr>
+            </a:r>
+          </a:p>
+          <a:p>
+            <a:pPr algn="l"/>
+            <a:r>
+              <a:t>Sprint 2: 新增 5 / 修复 3 — 知识管理模块开发</a:t>
+              <a:rPr sz="1800">
+                <a:solidFill>
+                  <a:srgbClr val="333333"/>
+                </a:solidFill>
+                <a:latin typeface="Helvetica Neue"/>
+                <a:ea typeface="PingFang SC"/>
+                <a:cs typeface="PingFang SC"/>
+              </a:rPr>
+            </a:r>
+          </a:p>
+          <a:p>
+            <a:pPr algn="l"/>
+            <a:r>
+              <a:t>Sprint 3: 新增 4 / 修复 5 — RAG + 认证模块</a:t>
+              <a:rPr sz="1800">
+                <a:solidFill>
+                  <a:srgbClr val="333333"/>
+                </a:solidFill>
+                <a:latin typeface="Helvetica Neue"/>
+                <a:ea typeface="PingFang SC"/>
+                <a:cs typeface="PingFang SC"/>
+              </a:rPr>
+            </a:r>
+          </a:p>
+          <a:p>
+            <a:pPr algn="l"/>
+            <a:r>
+              <a:t>Sprint 4: 新增 3 / 修复 4 — 文档生成 + 评估</a:t>
+              <a:rPr sz="1800">
+                <a:solidFill>
+                  <a:srgbClr val="333333"/>
+                </a:solidFill>
+                <a:latin typeface="Helvetica Neue"/>
+                <a:ea typeface="PingFang SC"/>
+                <a:cs typeface="PingFang SC"/>
+              </a:rPr>
+            </a:r>
+          </a:p>
+          <a:p>
+            <a:pPr algn="l"/>
+            <a:r>
+              <a:t/>
+              <a:rPr sz="1800">
+                <a:solidFill>
+                  <a:srgbClr val="333333"/>
+                </a:solidFill>
+                <a:latin typeface="Helvetica Neue"/>
+                <a:ea typeface="PingFang SC"/>
+                <a:cs typeface="PingFang SC"/>
+              </a:rPr>
+            </a:r>
+          </a:p>
+          <a:p>
+            <a:pPr algn="l"/>
+            <a:r>
+              <a:t>累计: 新增 15 / 修复 12 / 待修复 3</a:t>
+              <a:rPr sz="1800">
+                <a:solidFill>
+                  <a:srgbClr val="333333"/>
+                </a:solidFill>
+                <a:latin typeface="Helvetica Neue"/>
+                <a:ea typeface="PingFang SC"/>
+                <a:cs typeface="PingFang SC"/>
+              </a:rPr>
+            </a:r>
+          </a:p>
+          <a:p>
+            <a:pPr algn="l"/>
+            <a:r>
+              <a:t>高优 Bug: 0（所有高优 Bug 已修复）</a:t>
+              <a:rPr sz="1800">
                 <a:solidFill>
                   <a:srgbClr val="333333"/>
                 </a:solidFill>

--- a/samples/presentations/项目周报-2026-06-20.pptx
+++ b/samples/presentations/项目周报-2026-06-20.pptx
@@ -116,6 +116,356 @@
     </a:lvl9pPr>
   </p:defaultTextStyle>
 </p:presentation>
+</file>
+
+<file path=ppt/charts/chart1.xml><?xml version="1.0" encoding="utf-8"?>
+<c:chartSpace xmlns:c="http://schemas.openxmlformats.org/drawingml/2006/chart" xmlns:a="http://schemas.openxmlformats.org/drawingml/2006/main" xmlns:r="http://schemas.openxmlformats.org/officeDocument/2006/relationships">
+  <c:date1904 val="0"/>
+  <c:chart>
+    <c:autoTitleDeleted val="0"/>
+    <c:plotArea>
+      <c:barChart>
+        <c:barDir val="col"/>
+        <c:grouping val="clustered"/>
+        <c:ser>
+          <c:idx val="0"/>
+          <c:order val="0"/>
+          <c:tx>
+            <c:strRef>
+              <c:f>Sheet1!$B$1</c:f>
+              <c:strCache>
+                <c:ptCount val="1"/>
+                <c:pt idx="0">
+                  <c:v>计划任务</c:v>
+                </c:pt>
+              </c:strCache>
+            </c:strRef>
+          </c:tx>
+          <c:cat>
+            <c:strRef>
+              <c:f>Sheet1!$A$2:$A$5</c:f>
+              <c:strCache>
+                <c:ptCount val="4"/>
+                <c:pt idx="0">
+                  <c:v>Sprint 1</c:v>
+                </c:pt>
+                <c:pt idx="1">
+                  <c:v>Sprint 2</c:v>
+                </c:pt>
+                <c:pt idx="2">
+                  <c:v>Sprint 3</c:v>
+                </c:pt>
+                <c:pt idx="3">
+                  <c:v>Sprint 4</c:v>
+                </c:pt>
+              </c:strCache>
+            </c:strRef>
+          </c:cat>
+          <c:val>
+            <c:numRef>
+              <c:f>Sheet1!$B$2:$B$5</c:f>
+              <c:numCache>
+                <c:formatCode>General</c:formatCode>
+                <c:ptCount val="4"/>
+                <c:pt idx="0">
+                  <c:v>42</c:v>
+                </c:pt>
+                <c:pt idx="1">
+                  <c:v>51</c:v>
+                </c:pt>
+                <c:pt idx="2">
+                  <c:v>47</c:v>
+                </c:pt>
+                <c:pt idx="3">
+                  <c:v>55</c:v>
+                </c:pt>
+              </c:numCache>
+            </c:numRef>
+          </c:val>
+        </c:ser>
+        <c:ser>
+          <c:idx val="1"/>
+          <c:order val="1"/>
+          <c:tx>
+            <c:strRef>
+              <c:f>Sheet1!$C$1</c:f>
+              <c:strCache>
+                <c:ptCount val="1"/>
+                <c:pt idx="0">
+                  <c:v>完成任务</c:v>
+                </c:pt>
+              </c:strCache>
+            </c:strRef>
+          </c:tx>
+          <c:cat>
+            <c:strRef>
+              <c:f>Sheet1!$A$2:$A$5</c:f>
+              <c:strCache>
+                <c:ptCount val="4"/>
+                <c:pt idx="0">
+                  <c:v>Sprint 1</c:v>
+                </c:pt>
+                <c:pt idx="1">
+                  <c:v>Sprint 2</c:v>
+                </c:pt>
+                <c:pt idx="2">
+                  <c:v>Sprint 3</c:v>
+                </c:pt>
+                <c:pt idx="3">
+                  <c:v>Sprint 4</c:v>
+                </c:pt>
+              </c:strCache>
+            </c:strRef>
+          </c:cat>
+          <c:val>
+            <c:numRef>
+              <c:f>Sheet1!$C$2:$C$5</c:f>
+              <c:numCache>
+                <c:formatCode>General</c:formatCode>
+                <c:ptCount val="4"/>
+                <c:pt idx="0">
+                  <c:v>42</c:v>
+                </c:pt>
+                <c:pt idx="1">
+                  <c:v>51</c:v>
+                </c:pt>
+                <c:pt idx="2">
+                  <c:v>42</c:v>
+                </c:pt>
+                <c:pt idx="3">
+                  <c:v>55</c:v>
+                </c:pt>
+              </c:numCache>
+            </c:numRef>
+          </c:val>
+        </c:ser>
+        <c:axId val="-2068027336"/>
+        <c:axId val="-2113994440"/>
+      </c:barChart>
+      <c:catAx>
+        <c:axId val="-2068027336"/>
+        <c:scaling>
+          <c:orientation val="minMax"/>
+        </c:scaling>
+        <c:delete val="0"/>
+        <c:axPos val="b"/>
+        <c:majorTickMark val="out"/>
+        <c:minorTickMark val="none"/>
+        <c:tickLblPos val="nextTo"/>
+        <c:crossAx val="-2113994440"/>
+        <c:crosses val="autoZero"/>
+        <c:auto val="1"/>
+        <c:lblAlgn val="ctr"/>
+        <c:lblOffset val="100"/>
+        <c:noMultiLvlLbl val="0"/>
+      </c:catAx>
+      <c:valAx>
+        <c:axId val="-2113994440"/>
+        <c:scaling/>
+        <c:delete val="0"/>
+        <c:axPos val="l"/>
+        <c:majorGridlines/>
+        <c:majorTickMark val="out"/>
+        <c:minorTickMark val="none"/>
+        <c:tickLblPos val="nextTo"/>
+        <c:crossAx val="-2068027336"/>
+        <c:crosses val="autoZero"/>
+      </c:valAx>
+    </c:plotArea>
+    <c:legend>
+      <c:overlay val="0"/>
+    </c:legend>
+    <c:dispBlanksAs val="gap"/>
+  </c:chart>
+  <c:txPr>
+    <a:bodyPr/>
+    <a:lstStyle/>
+    <a:p>
+      <a:pPr>
+        <a:defRPr sz="1800"/>
+      </a:pPr>
+      <a:endParaRPr lang="en-US"/>
+    </a:p>
+  </c:txPr>
+  <c:externalData r:id="rId1">
+    <c:autoUpdate val="0"/>
+  </c:externalData>
+</c:chartSpace>
+</file>
+
+<file path=ppt/charts/chart2.xml><?xml version="1.0" encoding="utf-8"?>
+<c:chartSpace xmlns:c="http://schemas.openxmlformats.org/drawingml/2006/chart" xmlns:a="http://schemas.openxmlformats.org/drawingml/2006/main" xmlns:r="http://schemas.openxmlformats.org/officeDocument/2006/relationships">
+  <c:date1904 val="0"/>
+  <c:chart>
+    <c:autoTitleDeleted val="0"/>
+    <c:plotArea>
+      <c:barChart>
+        <c:barDir val="col"/>
+        <c:grouping val="clustered"/>
+        <c:ser>
+          <c:idx val="0"/>
+          <c:order val="0"/>
+          <c:tx>
+            <c:strRef>
+              <c:f>Sheet1!$B$1</c:f>
+              <c:strCache>
+                <c:ptCount val="1"/>
+                <c:pt idx="0">
+                  <c:v>新增 Bug</c:v>
+                </c:pt>
+              </c:strCache>
+            </c:strRef>
+          </c:tx>
+          <c:cat>
+            <c:strRef>
+              <c:f>Sheet1!$A$2:$A$5</c:f>
+              <c:strCache>
+                <c:ptCount val="4"/>
+                <c:pt idx="0">
+                  <c:v>Sprint 1</c:v>
+                </c:pt>
+                <c:pt idx="1">
+                  <c:v>Sprint 2</c:v>
+                </c:pt>
+                <c:pt idx="2">
+                  <c:v>Sprint 3</c:v>
+                </c:pt>
+                <c:pt idx="3">
+                  <c:v>Sprint 4</c:v>
+                </c:pt>
+              </c:strCache>
+            </c:strRef>
+          </c:cat>
+          <c:val>
+            <c:numRef>
+              <c:f>Sheet1!$B$2:$B$5</c:f>
+              <c:numCache>
+                <c:formatCode>General</c:formatCode>
+                <c:ptCount val="4"/>
+                <c:pt idx="0">
+                  <c:v>3</c:v>
+                </c:pt>
+                <c:pt idx="1">
+                  <c:v>5</c:v>
+                </c:pt>
+                <c:pt idx="2">
+                  <c:v>4</c:v>
+                </c:pt>
+                <c:pt idx="3">
+                  <c:v>3</c:v>
+                </c:pt>
+              </c:numCache>
+            </c:numRef>
+          </c:val>
+        </c:ser>
+        <c:ser>
+          <c:idx val="1"/>
+          <c:order val="1"/>
+          <c:tx>
+            <c:strRef>
+              <c:f>Sheet1!$C$1</c:f>
+              <c:strCache>
+                <c:ptCount val="1"/>
+                <c:pt idx="0">
+                  <c:v>修复 Bug</c:v>
+                </c:pt>
+              </c:strCache>
+            </c:strRef>
+          </c:tx>
+          <c:cat>
+            <c:strRef>
+              <c:f>Sheet1!$A$2:$A$5</c:f>
+              <c:strCache>
+                <c:ptCount val="4"/>
+                <c:pt idx="0">
+                  <c:v>Sprint 1</c:v>
+                </c:pt>
+                <c:pt idx="1">
+                  <c:v>Sprint 2</c:v>
+                </c:pt>
+                <c:pt idx="2">
+                  <c:v>Sprint 3</c:v>
+                </c:pt>
+                <c:pt idx="3">
+                  <c:v>Sprint 4</c:v>
+                </c:pt>
+              </c:strCache>
+            </c:strRef>
+          </c:cat>
+          <c:val>
+            <c:numRef>
+              <c:f>Sheet1!$C$2:$C$5</c:f>
+              <c:numCache>
+                <c:formatCode>General</c:formatCode>
+                <c:ptCount val="4"/>
+                <c:pt idx="0">
+                  <c:v>0</c:v>
+                </c:pt>
+                <c:pt idx="1">
+                  <c:v>3</c:v>
+                </c:pt>
+                <c:pt idx="2">
+                  <c:v>5</c:v>
+                </c:pt>
+                <c:pt idx="3">
+                  <c:v>4</c:v>
+                </c:pt>
+              </c:numCache>
+            </c:numRef>
+          </c:val>
+        </c:ser>
+        <c:axId val="-2068027336"/>
+        <c:axId val="-2113994440"/>
+      </c:barChart>
+      <c:catAx>
+        <c:axId val="-2068027336"/>
+        <c:scaling>
+          <c:orientation val="minMax"/>
+        </c:scaling>
+        <c:delete val="0"/>
+        <c:axPos val="b"/>
+        <c:majorTickMark val="out"/>
+        <c:minorTickMark val="none"/>
+        <c:tickLblPos val="nextTo"/>
+        <c:crossAx val="-2113994440"/>
+        <c:crosses val="autoZero"/>
+        <c:auto val="1"/>
+        <c:lblAlgn val="ctr"/>
+        <c:lblOffset val="100"/>
+        <c:noMultiLvlLbl val="0"/>
+      </c:catAx>
+      <c:valAx>
+        <c:axId val="-2113994440"/>
+        <c:scaling/>
+        <c:delete val="0"/>
+        <c:axPos val="l"/>
+        <c:majorGridlines/>
+        <c:majorTickMark val="out"/>
+        <c:minorTickMark val="none"/>
+        <c:tickLblPos val="nextTo"/>
+        <c:crossAx val="-2068027336"/>
+        <c:crosses val="autoZero"/>
+      </c:valAx>
+    </c:plotArea>
+    <c:legend>
+      <c:overlay val="0"/>
+    </c:legend>
+    <c:dispBlanksAs val="gap"/>
+  </c:chart>
+  <c:txPr>
+    <a:bodyPr/>
+    <a:lstStyle/>
+    <a:p>
+      <a:pPr>
+        <a:defRPr sz="1800"/>
+      </a:pPr>
+      <a:endParaRPr lang="en-US"/>
+    </a:p>
+  </c:txPr>
+  <c:externalData r:id="rId1">
+    <c:autoUpdate val="0"/>
+  </c:externalData>
+</c:chartSpace>
 </file>
 
 <file path=ppt/slideLayouts/slideLayout1.xml><?xml version="1.0" encoding="utf-8"?>
@@ -4445,7 +4795,7 @@
           <a:lstStyle/>
           <a:p>
             <a:r>
-              <a:t>关键数据</a:t>
+              <a:t>Sprint 进度</a:t>
               <a:rPr sz="3200" b="1">
                 <a:solidFill>
                   <a:srgbClr val="000000"/>
@@ -4458,302 +4808,24 @@
           </a:p>
         </p:txBody>
       </p:sp>
-      <p:sp>
-        <p:nvSpPr>
-          <p:cNvPr id="3" name="TextBox 2"/>
-          <p:cNvSpPr txBox="1"/>
+      <p:graphicFrame>
+        <p:nvGraphicFramePr>
+          <p:cNvPr id="3" name="Chart 2"/>
+          <p:cNvGraphicFramePr>
+            <a:graphicFrameLocks noGrp="1"/>
+          </p:cNvGraphicFramePr>
           <p:nvPr/>
-        </p:nvSpPr>
-        <p:spPr>
-          <a:xfrm>
-            <a:off x="1371600" y="2286000"/>
-            <a:ext cx="2286000" cy="914400"/>
-          </a:xfrm>
-          <a:prstGeom prst="rect">
-            <a:avLst/>
-          </a:prstGeom>
-          <a:noFill/>
-        </p:spPr>
-        <p:txBody>
-          <a:bodyPr wrap="none">
-            <a:spAutoFit/>
-          </a:bodyPr>
-          <a:lstStyle/>
-          <a:p>
-            <a:pPr algn="ctr"/>
-            <a:r>
-              <a:t>23</a:t>
-              <a:rPr sz="4800" b="1">
-                <a:solidFill>
-                  <a:srgbClr val="1a56db"/>
-                </a:solidFill>
-                <a:latin typeface="Helvetica Neue"/>
-                <a:ea typeface="PingFang SC"/>
-                <a:cs typeface="PingFang SC"/>
-              </a:rPr>
-            </a:r>
-          </a:p>
-        </p:txBody>
-      </p:sp>
-      <p:sp>
-        <p:nvSpPr>
-          <p:cNvPr id="4" name="TextBox 3"/>
-          <p:cNvSpPr txBox="1"/>
-          <p:nvPr/>
-        </p:nvSpPr>
-        <p:spPr>
-          <a:xfrm>
-            <a:off x="1371600" y="3474720"/>
-            <a:ext cx="2286000" cy="457200"/>
-          </a:xfrm>
-          <a:prstGeom prst="rect">
-            <a:avLst/>
-          </a:prstGeom>
-          <a:noFill/>
-        </p:spPr>
-        <p:txBody>
-          <a:bodyPr wrap="none">
-            <a:spAutoFit/>
-          </a:bodyPr>
-          <a:lstStyle/>
-          <a:p>
-            <a:pPr algn="ctr"/>
-            <a:r>
-              <a:t>代码 PR</a:t>
-              <a:rPr sz="1400">
-                <a:solidFill>
-                  <a:srgbClr val="666666"/>
-                </a:solidFill>
-                <a:latin typeface="Helvetica Neue"/>
-                <a:ea typeface="PingFang SC"/>
-                <a:cs typeface="PingFang SC"/>
-              </a:rPr>
-            </a:r>
-          </a:p>
-        </p:txBody>
-      </p:sp>
-      <p:sp>
-        <p:nvSpPr>
-          <p:cNvPr id="5" name="TextBox 4"/>
-          <p:cNvSpPr txBox="1"/>
-          <p:nvPr/>
-        </p:nvSpPr>
-        <p:spPr>
-          <a:xfrm>
-            <a:off x="4114800" y="2286000"/>
-            <a:ext cx="2286000" cy="914400"/>
-          </a:xfrm>
-          <a:prstGeom prst="rect">
-            <a:avLst/>
-          </a:prstGeom>
-          <a:noFill/>
-        </p:spPr>
-        <p:txBody>
-          <a:bodyPr wrap="none">
-            <a:spAutoFit/>
-          </a:bodyPr>
-          <a:lstStyle/>
-          <a:p>
-            <a:pPr algn="ctr"/>
-            <a:r>
-              <a:t>3</a:t>
-              <a:rPr sz="4800" b="1">
-                <a:solidFill>
-                  <a:srgbClr val="1a56db"/>
-                </a:solidFill>
-                <a:latin typeface="Helvetica Neue"/>
-                <a:ea typeface="PingFang SC"/>
-                <a:cs typeface="PingFang SC"/>
-              </a:rPr>
-            </a:r>
-          </a:p>
-        </p:txBody>
-      </p:sp>
-      <p:sp>
-        <p:nvSpPr>
-          <p:cNvPr id="6" name="TextBox 5"/>
-          <p:cNvSpPr txBox="1"/>
-          <p:nvPr/>
-        </p:nvSpPr>
-        <p:spPr>
-          <a:xfrm>
-            <a:off x="4114800" y="3474720"/>
-            <a:ext cx="2286000" cy="457200"/>
-          </a:xfrm>
-          <a:prstGeom prst="rect">
-            <a:avLst/>
-          </a:prstGeom>
-          <a:noFill/>
-        </p:spPr>
-        <p:txBody>
-          <a:bodyPr wrap="none">
-            <a:spAutoFit/>
-          </a:bodyPr>
-          <a:lstStyle/>
-          <a:p>
-            <a:pPr algn="ctr"/>
-            <a:r>
-              <a:t>Bug 修复</a:t>
-              <a:rPr sz="1400">
-                <a:solidFill>
-                  <a:srgbClr val="666666"/>
-                </a:solidFill>
-                <a:latin typeface="Helvetica Neue"/>
-                <a:ea typeface="PingFang SC"/>
-                <a:cs typeface="PingFang SC"/>
-              </a:rPr>
-            </a:r>
-          </a:p>
-        </p:txBody>
-      </p:sp>
-      <p:sp>
-        <p:nvSpPr>
-          <p:cNvPr id="7" name="TextBox 6"/>
-          <p:cNvSpPr txBox="1"/>
-          <p:nvPr/>
-        </p:nvSpPr>
-        <p:spPr>
-          <a:xfrm>
-            <a:off x="6858000" y="2286000"/>
-            <a:ext cx="2286000" cy="914400"/>
-          </a:xfrm>
-          <a:prstGeom prst="rect">
-            <a:avLst/>
-          </a:prstGeom>
-          <a:noFill/>
-        </p:spPr>
-        <p:txBody>
-          <a:bodyPr wrap="none">
-            <a:spAutoFit/>
-          </a:bodyPr>
-          <a:lstStyle/>
-          <a:p>
-            <a:pPr algn="ctr"/>
-            <a:r>
-              <a:t>85%</a:t>
-              <a:rPr sz="4800" b="1">
-                <a:solidFill>
-                  <a:srgbClr val="1a56db"/>
-                </a:solidFill>
-                <a:latin typeface="Helvetica Neue"/>
-                <a:ea typeface="PingFang SC"/>
-                <a:cs typeface="PingFang SC"/>
-              </a:rPr>
-            </a:r>
-          </a:p>
-        </p:txBody>
-      </p:sp>
-      <p:sp>
-        <p:nvSpPr>
-          <p:cNvPr id="8" name="TextBox 7"/>
-          <p:cNvSpPr txBox="1"/>
-          <p:nvPr/>
-        </p:nvSpPr>
-        <p:spPr>
-          <a:xfrm>
-            <a:off x="6858000" y="3474720"/>
-            <a:ext cx="2286000" cy="457200"/>
-          </a:xfrm>
-          <a:prstGeom prst="rect">
-            <a:avLst/>
-          </a:prstGeom>
-          <a:noFill/>
-        </p:spPr>
-        <p:txBody>
-          <a:bodyPr wrap="none">
-            <a:spAutoFit/>
-          </a:bodyPr>
-          <a:lstStyle/>
-          <a:p>
-            <a:pPr algn="ctr"/>
-            <a:r>
-              <a:t>测试覆盖率</a:t>
-              <a:rPr sz="1400">
-                <a:solidFill>
-                  <a:srgbClr val="666666"/>
-                </a:solidFill>
-                <a:latin typeface="Helvetica Neue"/>
-                <a:ea typeface="PingFang SC"/>
-                <a:cs typeface="PingFang SC"/>
-              </a:rPr>
-            </a:r>
-          </a:p>
-        </p:txBody>
-      </p:sp>
-      <p:sp>
-        <p:nvSpPr>
-          <p:cNvPr id="9" name="TextBox 8"/>
-          <p:cNvSpPr txBox="1"/>
-          <p:nvPr/>
-        </p:nvSpPr>
-        <p:spPr>
-          <a:xfrm>
-            <a:off x="9601200" y="2286000"/>
-            <a:ext cx="2286000" cy="914400"/>
-          </a:xfrm>
-          <a:prstGeom prst="rect">
-            <a:avLst/>
-          </a:prstGeom>
-          <a:noFill/>
-        </p:spPr>
-        <p:txBody>
-          <a:bodyPr wrap="none">
-            <a:spAutoFit/>
-          </a:bodyPr>
-          <a:lstStyle/>
-          <a:p>
-            <a:pPr algn="ctr"/>
-            <a:r>
-              <a:t>100%</a:t>
-              <a:rPr sz="4800" b="1">
-                <a:solidFill>
-                  <a:srgbClr val="1a56db"/>
-                </a:solidFill>
-                <a:latin typeface="Helvetica Neue"/>
-                <a:ea typeface="PingFang SC"/>
-                <a:cs typeface="PingFang SC"/>
-              </a:rPr>
-            </a:r>
-          </a:p>
-        </p:txBody>
-      </p:sp>
-      <p:sp>
-        <p:nvSpPr>
-          <p:cNvPr id="10" name="TextBox 9"/>
-          <p:cNvSpPr txBox="1"/>
-          <p:nvPr/>
-        </p:nvSpPr>
-        <p:spPr>
-          <a:xfrm>
-            <a:off x="9601200" y="3474720"/>
-            <a:ext cx="2286000" cy="457200"/>
-          </a:xfrm>
-          <a:prstGeom prst="rect">
-            <a:avLst/>
-          </a:prstGeom>
-          <a:noFill/>
-        </p:spPr>
-        <p:txBody>
-          <a:bodyPr wrap="none">
-            <a:spAutoFit/>
-          </a:bodyPr>
-          <a:lstStyle/>
-          <a:p>
-            <a:pPr algn="ctr"/>
-            <a:r>
-              <a:t>认证模块</a:t>
-              <a:rPr sz="1400">
-                <a:solidFill>
-                  <a:srgbClr val="666666"/>
-                </a:solidFill>
-                <a:latin typeface="Helvetica Neue"/>
-                <a:ea typeface="PingFang SC"/>
-                <a:cs typeface="PingFang SC"/>
-              </a:rPr>
-            </a:r>
-          </a:p>
-        </p:txBody>
-      </p:sp>
+        </p:nvGraphicFramePr>
+        <p:xfrm>
+          <a:off x="914400" y="1371600"/>
+          <a:ext cx="10058400" cy="4572000"/>
+        </p:xfrm>
+        <a:graphic>
+          <a:graphicData uri="http://schemas.openxmlformats.org/drawingml/2006/chart">
+            <c:chart xmlns:c="http://schemas.openxmlformats.org/drawingml/2006/chart" r:id="rId2"/>
+          </a:graphicData>
+        </a:graphic>
+      </p:graphicFrame>
     </p:spTree>
   </p:cSld>
   <p:clrMapOvr>
@@ -5526,128 +5598,24 @@
           </a:p>
         </p:txBody>
       </p:sp>
-      <p:sp>
-        <p:nvSpPr>
-          <p:cNvPr id="3" name="TextBox 2"/>
-          <p:cNvSpPr txBox="1"/>
+      <p:graphicFrame>
+        <p:nvGraphicFramePr>
+          <p:cNvPr id="3" name="Chart 2"/>
+          <p:cNvGraphicFramePr>
+            <a:graphicFrameLocks noGrp="1"/>
+          </p:cNvGraphicFramePr>
           <p:nvPr/>
-        </p:nvSpPr>
-        <p:spPr>
-          <a:xfrm>
-            <a:off x="914400" y="1828800"/>
-            <a:ext cx="10058400" cy="3657600"/>
-          </a:xfrm>
-          <a:prstGeom prst="rect">
-            <a:avLst/>
-          </a:prstGeom>
-          <a:noFill/>
-        </p:spPr>
-        <p:txBody>
-          <a:bodyPr wrap="square">
-            <a:spAutoFit/>
-          </a:bodyPr>
-          <a:lstStyle/>
-          <a:p/>
-          <a:p>
-            <a:pPr algn="l"/>
-            <a:r>
-              <a:t>Sprint 1: 新增 3 / 修复 0 — 基础设施搭建阶段</a:t>
-              <a:rPr sz="1800">
-                <a:solidFill>
-                  <a:srgbClr val="333333"/>
-                </a:solidFill>
-                <a:latin typeface="Helvetica Neue"/>
-                <a:ea typeface="PingFang SC"/>
-                <a:cs typeface="PingFang SC"/>
-              </a:rPr>
-            </a:r>
-          </a:p>
-          <a:p>
-            <a:pPr algn="l"/>
-            <a:r>
-              <a:t>Sprint 2: 新增 5 / 修复 3 — 知识管理模块开发</a:t>
-              <a:rPr sz="1800">
-                <a:solidFill>
-                  <a:srgbClr val="333333"/>
-                </a:solidFill>
-                <a:latin typeface="Helvetica Neue"/>
-                <a:ea typeface="PingFang SC"/>
-                <a:cs typeface="PingFang SC"/>
-              </a:rPr>
-            </a:r>
-          </a:p>
-          <a:p>
-            <a:pPr algn="l"/>
-            <a:r>
-              <a:t>Sprint 3: 新增 4 / 修复 5 — RAG + 认证模块</a:t>
-              <a:rPr sz="1800">
-                <a:solidFill>
-                  <a:srgbClr val="333333"/>
-                </a:solidFill>
-                <a:latin typeface="Helvetica Neue"/>
-                <a:ea typeface="PingFang SC"/>
-                <a:cs typeface="PingFang SC"/>
-              </a:rPr>
-            </a:r>
-          </a:p>
-          <a:p>
-            <a:pPr algn="l"/>
-            <a:r>
-              <a:t>Sprint 4: 新增 3 / 修复 4 — 文档生成 + 评估</a:t>
-              <a:rPr sz="1800">
-                <a:solidFill>
-                  <a:srgbClr val="333333"/>
-                </a:solidFill>
-                <a:latin typeface="Helvetica Neue"/>
-                <a:ea typeface="PingFang SC"/>
-                <a:cs typeface="PingFang SC"/>
-              </a:rPr>
-            </a:r>
-          </a:p>
-          <a:p>
-            <a:pPr algn="l"/>
-            <a:r>
-              <a:t/>
-              <a:rPr sz="1800">
-                <a:solidFill>
-                  <a:srgbClr val="333333"/>
-                </a:solidFill>
-                <a:latin typeface="Helvetica Neue"/>
-                <a:ea typeface="PingFang SC"/>
-                <a:cs typeface="PingFang SC"/>
-              </a:rPr>
-            </a:r>
-          </a:p>
-          <a:p>
-            <a:pPr algn="l"/>
-            <a:r>
-              <a:t>累计: 新增 15 / 修复 12 / 待修复 3</a:t>
-              <a:rPr sz="1800">
-                <a:solidFill>
-                  <a:srgbClr val="333333"/>
-                </a:solidFill>
-                <a:latin typeface="Helvetica Neue"/>
-                <a:ea typeface="PingFang SC"/>
-                <a:cs typeface="PingFang SC"/>
-              </a:rPr>
-            </a:r>
-          </a:p>
-          <a:p>
-            <a:pPr algn="l"/>
-            <a:r>
-              <a:t>高优 Bug: 0（所有高优 Bug 已修复）</a:t>
-              <a:rPr sz="1800">
-                <a:solidFill>
-                  <a:srgbClr val="333333"/>
-                </a:solidFill>
-                <a:latin typeface="Helvetica Neue"/>
-                <a:ea typeface="PingFang SC"/>
-                <a:cs typeface="PingFang SC"/>
-              </a:rPr>
-            </a:r>
-          </a:p>
-        </p:txBody>
-      </p:sp>
+        </p:nvGraphicFramePr>
+        <p:xfrm>
+          <a:off x="914400" y="1371600"/>
+          <a:ext cx="10058400" cy="4572000"/>
+        </p:xfrm>
+        <a:graphic>
+          <a:graphicData uri="http://schemas.openxmlformats.org/drawingml/2006/chart">
+            <c:chart xmlns:c="http://schemas.openxmlformats.org/drawingml/2006/chart" r:id="rId2"/>
+          </a:graphicData>
+        </a:graphic>
+      </p:graphicFrame>
     </p:spTree>
   </p:cSld>
   <p:clrMapOvr>
